--- a/docs/pptx/auc3/ritu-auc3-adjcif-aki2.pptx
+++ b/docs/pptx/auc3/ritu-auc3-adjcif-aki2.pptx
@@ -2271,7 +2271,7 @@
           </p:nvSpPr>
           <p:spPr>
             <a:xfrm>
-              <a:off x="972874" y="5119060"/>
+              <a:off x="972874" y="5122286"/>
               <a:ext cx="7644336" cy="0"/>
             </a:xfrm>
             <a:custGeom>
@@ -2314,7 +2314,7 @@
           </p:nvSpPr>
           <p:spPr>
             <a:xfrm>
-              <a:off x="972874" y="4196335"/>
+              <a:off x="972874" y="4206014"/>
               <a:ext cx="7644336" cy="0"/>
             </a:xfrm>
             <a:custGeom>
@@ -2357,7 +2357,7 @@
           </p:nvSpPr>
           <p:spPr>
             <a:xfrm>
-              <a:off x="972874" y="3273611"/>
+              <a:off x="972874" y="3289743"/>
               <a:ext cx="7644336" cy="0"/>
             </a:xfrm>
             <a:custGeom>
@@ -2615,7 +2615,7 @@
           </p:nvSpPr>
           <p:spPr>
             <a:xfrm>
-              <a:off x="972874" y="4657697"/>
+              <a:off x="972874" y="4664150"/>
               <a:ext cx="7644336" cy="0"/>
             </a:xfrm>
             <a:custGeom>
@@ -2658,7 +2658,7 @@
           </p:nvSpPr>
           <p:spPr>
             <a:xfrm>
-              <a:off x="972874" y="3734973"/>
+              <a:off x="972874" y="3747878"/>
               <a:ext cx="7644336" cy="0"/>
             </a:xfrm>
             <a:custGeom>
@@ -2701,7 +2701,7 @@
           </p:nvSpPr>
           <p:spPr>
             <a:xfrm>
-              <a:off x="972874" y="2812248"/>
+              <a:off x="972874" y="2831607"/>
               <a:ext cx="7644336" cy="0"/>
             </a:xfrm>
             <a:custGeom>
@@ -3084,7 +3084,7 @@
           </p:nvSpPr>
           <p:spPr>
             <a:xfrm>
-              <a:off x="692708" y="4617647"/>
+              <a:off x="692708" y="4624099"/>
               <a:ext cx="217535" cy="80101"/>
             </a:xfrm>
             <a:prstGeom prst="rect">
@@ -3130,7 +3130,7 @@
           </p:nvSpPr>
           <p:spPr>
             <a:xfrm>
-              <a:off x="692708" y="3694922"/>
+              <a:off x="692708" y="3707828"/>
               <a:ext cx="217535" cy="80101"/>
             </a:xfrm>
             <a:prstGeom prst="rect">
@@ -3176,7 +3176,7 @@
           </p:nvSpPr>
           <p:spPr>
             <a:xfrm>
-              <a:off x="692708" y="2772198"/>
+              <a:off x="692708" y="2791556"/>
               <a:ext cx="217535" cy="80101"/>
             </a:xfrm>
             <a:prstGeom prst="rect">
